--- a/yunqi-2026-agenda-201/docs/洞察一页-04-以 ACK 为底座的开放产线与数据飞轮.pptx
+++ b/yunqi-2026-agenda-201/docs/洞察一页-04-以 ACK 为底座的开放产线与数据飞轮.pptx
@@ -3141,7 +3141,7 @@
         <p:spPr>
           <a:xfrm>
             <a:off x="0" y="0"/>
-            <a:ext cx="12191695" cy="1051560"/>
+            <a:ext cx="12191695" cy="1097280"/>
           </a:xfrm>
           <a:prstGeom prst="rect">
             <a:avLst/>
@@ -3183,8 +3183,8 @@
         </p:nvSpPr>
         <p:spPr>
           <a:xfrm>
-            <a:off x="365760" y="146304"/>
-            <a:ext cx="11430000" cy="274320"/>
+            <a:off x="320040" y="91440"/>
+            <a:ext cx="11521440" cy="237744"/>
           </a:xfrm>
           <a:prstGeom prst="rect">
             <a:avLst/>
@@ -3199,7 +3199,7 @@
           <a:p>
             <a:pPr algn="l"/>
             <a:r>
-              <a:rPr sz="1300" b="0">
+              <a:rPr sz="1200" b="0">
                 <a:solidFill>
                   <a:srgbClr val="6B6B6B"/>
                 </a:solidFill>
@@ -3219,8 +3219,8 @@
         </p:nvSpPr>
         <p:spPr>
           <a:xfrm>
-            <a:off x="365760" y="420624"/>
-            <a:ext cx="11430000" cy="502920"/>
+            <a:off x="320040" y="347472"/>
+            <a:ext cx="11521440" cy="658368"/>
           </a:xfrm>
           <a:prstGeom prst="rect">
             <a:avLst/>
@@ -3235,14 +3235,14 @@
           <a:p>
             <a:pPr algn="l"/>
             <a:r>
-              <a:rPr sz="2000" b="1">
+              <a:rPr sz="1600" b="1">
                 <a:solidFill>
                   <a:srgbClr val="1A1A1A"/>
                 </a:solidFill>
                 <a:latin typeface="Microsoft YaHei"/>
                 <a:ea typeface="Microsoft YaHei"/>
               </a:rPr>
-              <a:t>洞察：以托管 Argo（Serverless/节点池混部）+ Ray on CCE/ACK 对标建设…</a:t>
+              <a:t>洞察：以托管 Argo（Serverless/节点池混部）+ Ray on CCE/ACK 对标建设开放产线底座，用对象存储缓存与 GPU 公平配额吃下数据准备与分布式计算峰值。</a:t>
             </a:r>
           </a:p>
         </p:txBody>
@@ -3255,8 +3255,8 @@
         </p:nvSpPr>
         <p:spPr>
           <a:xfrm>
-            <a:off x="320040" y="1207008"/>
-            <a:ext cx="11521440" cy="502920"/>
+            <a:off x="274320" y="1207008"/>
+            <a:ext cx="11612880" cy="749808"/>
           </a:xfrm>
           <a:prstGeom prst="rect">
             <a:avLst/>
@@ -3300,8 +3300,8 @@
         </p:nvSpPr>
         <p:spPr>
           <a:xfrm>
-            <a:off x="457200" y="1298448"/>
-            <a:ext cx="11247120" cy="365760"/>
+            <a:off x="411480" y="1261872"/>
+            <a:ext cx="11338560" cy="640080"/>
           </a:xfrm>
           <a:prstGeom prst="rect">
             <a:avLst/>
@@ -3316,14 +3316,14 @@
           <a:p>
             <a:pPr algn="l"/>
             <a:r>
-              <a:rPr sz="1300" b="1">
+              <a:rPr sz="1200" b="1">
                 <a:solidFill>
                   <a:srgbClr val="1A1A1A"/>
                 </a:solidFill>
                 <a:latin typeface="Microsoft YaHei"/>
                 <a:ea typeface="Microsoft YaHei"/>
               </a:rPr>
-              <a:t>一句话判断：本场围绕 ACK 托管底座上的开放 AI 数据产线：以「数据闭环天然是工作流」为起点，用全托管容器 Argo 工作流集群编排大规模离线数据与科学计算（相对开源自建宣称约 30% 资源成本节省、规模约 10×）；Argo…</a:t>
+              <a:t>一句话判断：本场围绕 ACK 托管底座上的开放 AI 数据产线：以「数据闭环天然是工作流」为起点，用全托管容器 Argo 工作流集群编排大规模离线数据与科学计算（相对开源自建宣称约 30% 资源成本节省、规模约 10×）；Argo 原生纳管 RayCluster 生命周期，打通数据收集→Spark→Ray→PyTorch→归档；Ray on ACK 面向大模型/具身/智驾等分布式计算，给出万级 Pod 秒级扩容与单集群海量 RayCluster 并发指标。</a:t>
             </a:r>
           </a:p>
         </p:txBody>
@@ -3336,8 +3336,8 @@
         </p:nvSpPr>
         <p:spPr>
           <a:xfrm>
-            <a:off x="320040" y="1874519"/>
-            <a:ext cx="3703320" cy="2606040"/>
+            <a:off x="274320" y="2084831"/>
+            <a:ext cx="3749039" cy="2267712"/>
           </a:xfrm>
           <a:prstGeom prst="rect">
             <a:avLst/>
@@ -3381,8 +3381,8 @@
         </p:nvSpPr>
         <p:spPr>
           <a:xfrm>
-            <a:off x="457200" y="2011679"/>
-            <a:ext cx="3429000" cy="320040"/>
+            <a:off x="402336" y="2176271"/>
+            <a:ext cx="3493007" cy="292608"/>
           </a:xfrm>
           <a:prstGeom prst="rect">
             <a:avLst/>
@@ -3397,7 +3397,7 @@
           <a:p>
             <a:pPr algn="l"/>
             <a:r>
-              <a:rPr sz="1500" b="1">
+              <a:rPr sz="1400" b="1">
                 <a:solidFill>
                   <a:srgbClr val="8B1A2B"/>
                 </a:solidFill>
@@ -3417,8 +3417,8 @@
         </p:nvSpPr>
         <p:spPr>
           <a:xfrm>
-            <a:off x="484632" y="2377439"/>
-            <a:ext cx="3374136" cy="1965960"/>
+            <a:off x="402336" y="2487167"/>
+            <a:ext cx="3493007" cy="1764792"/>
           </a:xfrm>
           <a:prstGeom prst="rect">
             <a:avLst/>
@@ -3433,52 +3433,69 @@
           <a:p>
             <a:pPr algn="l">
               <a:spcAft>
-                <a:spcPts val="400"/>
+                <a:spcPts val="200"/>
               </a:spcAft>
             </a:pPr>
             <a:r>
-              <a:rPr sz="1200" b="1">
+              <a:rPr sz="1100" b="1">
                 <a:solidFill>
                   <a:srgbClr val="1A1A1A"/>
                 </a:solidFill>
                 <a:latin typeface="Microsoft YaHei"/>
                 <a:ea typeface="Microsoft YaHei"/>
               </a:rPr>
-              <a:t>定位：云原生离线任务编排与运行引擎，全托管免运维，支撑大规模数据处理流水线；场景含…</a:t>
+              <a:t>HCS 应在 CCE 上提供托管 Argo/Workflow 类 SKU（控制面托管 + Serverless/节点池执行）</a:t>
             </a:r>
           </a:p>
           <a:p>
             <a:pPr algn="l">
               <a:spcAft>
-                <a:spcPts val="400"/>
+                <a:spcPts val="200"/>
               </a:spcAft>
             </a:pPr>
             <a:r>
-              <a:rPr sz="1200" b="0">
+              <a:rPr sz="1100" b="0">
                 <a:solidFill>
                   <a:srgbClr val="4A4A4A"/>
                 </a:solidFill>
                 <a:latin typeface="Microsoft YaHei"/>
                 <a:ea typeface="Microsoft YaHei"/>
               </a:rPr>
-              <a:t>• 架构：Argo API/CLI/UI/Python SDK → ACK 控制面（Argo Server/Event/Workflow …</a:t>
+              <a:t>• 定位：云原生离线任务编排与运行引擎，全托管免运维，支撑大规模数据处理流水线</a:t>
             </a:r>
           </a:p>
           <a:p>
             <a:pPr algn="l">
               <a:spcAft>
-                <a:spcPts val="400"/>
+                <a:spcPts val="200"/>
               </a:spcAft>
             </a:pPr>
             <a:r>
-              <a:rPr sz="1200" b="0">
+              <a:rPr sz="1100" b="0">
                 <a:solidFill>
                   <a:srgbClr val="4A4A4A"/>
                 </a:solidFill>
                 <a:latin typeface="Microsoft YaHei"/>
                 <a:ea typeface="Microsoft YaHei"/>
               </a:rPr>
-              <a:t>• 能力点：多算力、万级并发工作流与千万级任务、OSS 缓存吞吐提升、多租配额与 GPU 弹性公平调度、开箱可观测与自愈。</a:t>
+              <a:t>• 架构：Argo API/CLI/UI/Python SDK → ACK 控制面（Argo Server/Event/Workflow Controller）→ ACS Serverless CPU/GPU Pod 与节点池混部，并行超配与公平调度</a:t>
+            </a:r>
+          </a:p>
+          <a:p>
+            <a:pPr algn="l">
+              <a:spcAft>
+                <a:spcPts val="200"/>
+              </a:spcAft>
+            </a:pPr>
+            <a:r>
+              <a:rPr sz="1100" b="0">
+                <a:solidFill>
+                  <a:srgbClr val="4A4A4A"/>
+                </a:solidFill>
+                <a:latin typeface="Microsoft YaHei"/>
+                <a:ea typeface="Microsoft YaHei"/>
+              </a:rPr>
+              <a:t>• 能力点：多算力、万级并发工作流与千万级任务、OSS 缓存吞吐提升、多租配额与 GPU 弹性公平调度、开箱可观测与自愈</a:t>
             </a:r>
           </a:p>
         </p:txBody>
@@ -3491,8 +3508,8 @@
         </p:nvSpPr>
         <p:spPr>
           <a:xfrm>
-            <a:off x="4224528" y="1874519"/>
-            <a:ext cx="3703320" cy="2606040"/>
+            <a:off x="4187951" y="2084831"/>
+            <a:ext cx="3749039" cy="2267712"/>
           </a:xfrm>
           <a:prstGeom prst="rect">
             <a:avLst/>
@@ -3536,8 +3553,8 @@
         </p:nvSpPr>
         <p:spPr>
           <a:xfrm>
-            <a:off x="4361688" y="2011679"/>
-            <a:ext cx="3429000" cy="320040"/>
+            <a:off x="4315967" y="2176271"/>
+            <a:ext cx="3493007" cy="292608"/>
           </a:xfrm>
           <a:prstGeom prst="rect">
             <a:avLst/>
@@ -3552,14 +3569,14 @@
           <a:p>
             <a:pPr algn="l"/>
             <a:r>
-              <a:rPr sz="1500" b="1">
+              <a:rPr sz="1400" b="1">
                 <a:solidFill>
                   <a:srgbClr val="8B1A2B"/>
                 </a:solidFill>
                 <a:latin typeface="Microsoft YaHei"/>
                 <a:ea typeface="Microsoft YaHei"/>
               </a:rPr>
-              <a:t>02  Argo Workflows …</a:t>
+              <a:t>02  纳管 RayCluster</a:t>
             </a:r>
           </a:p>
         </p:txBody>
@@ -3572,8 +3589,8 @@
         </p:nvSpPr>
         <p:spPr>
           <a:xfrm>
-            <a:off x="4389120" y="2377439"/>
-            <a:ext cx="3374136" cy="1965960"/>
+            <a:off x="4315967" y="2487167"/>
+            <a:ext cx="3493007" cy="1764792"/>
           </a:xfrm>
           <a:prstGeom prst="rect">
             <a:avLst/>
@@ -3588,52 +3605,69 @@
           <a:p>
             <a:pPr algn="l">
               <a:spcAft>
-                <a:spcPts val="400"/>
+                <a:spcPts val="200"/>
               </a:spcAft>
             </a:pPr>
             <a:r>
-              <a:rPr sz="1200" b="1">
+              <a:rPr sz="1100" b="1">
                 <a:solidFill>
                   <a:srgbClr val="1A1A1A"/>
                 </a:solidFill>
                 <a:latin typeface="Microsoft YaHei"/>
                 <a:ea typeface="Microsoft YaHei"/>
               </a:rPr>
-              <a:t>典型流水线：数据收集 → Spark job → Ray job → PyTorc…</a:t>
+              <a:t>开放产线关键是「工作流引擎纳管分布式计算框架」：HCS 应提供 Argo/Volcano 等与 Ray Operator 的托管组合</a:t>
             </a:r>
           </a:p>
           <a:p>
             <a:pPr algn="l">
               <a:spcAft>
-                <a:spcPts val="400"/>
+                <a:spcPts val="200"/>
               </a:spcAft>
             </a:pPr>
             <a:r>
-              <a:rPr sz="1200" b="0">
+              <a:rPr sz="1100" b="0">
                 <a:solidFill>
                   <a:srgbClr val="4A4A4A"/>
                 </a:solidFill>
                 <a:latin typeface="Microsoft YaHei"/>
                 <a:ea typeface="Microsoft YaHei"/>
               </a:rPr>
-              <a:t>• 栈结构：ACK 控制面 → Argo Workflow + Plugins → Ray / PyTorch / Spark。</a:t>
+              <a:t>• 典型流水线：数据收集 → Spark job → Ray job → PyTorch job → 数据归档，由容器 Argo 工作流集群一站编排</a:t>
             </a:r>
           </a:p>
           <a:p>
             <a:pPr algn="l">
               <a:spcAft>
-                <a:spcPts val="400"/>
+                <a:spcPts val="200"/>
               </a:spcAft>
             </a:pPr>
             <a:r>
-              <a:rPr sz="1200" b="0">
+              <a:rPr sz="1100" b="0">
                 <a:solidFill>
                   <a:srgbClr val="4A4A4A"/>
                 </a:solidFill>
                 <a:latin typeface="Microsoft YaHei"/>
                 <a:ea typeface="Microsoft YaHei"/>
               </a:rPr>
-              <a:t>• 能力：用 Argo 管理 RayCluster 部署/扩缩/删除全生命周期；编排复杂流程并复用既有 CD；Argo UI 记录展示 R…</a:t>
+              <a:t>• 栈结构：ACK 控制面 → Argo Workflow + Plugins → Ray / PyTorch / Spark</a:t>
+            </a:r>
+          </a:p>
+          <a:p>
+            <a:pPr algn="l">
+              <a:spcAft>
+                <a:spcPts val="200"/>
+              </a:spcAft>
+            </a:pPr>
+            <a:r>
+              <a:rPr sz="1100" b="0">
+                <a:solidFill>
+                  <a:srgbClr val="4A4A4A"/>
+                </a:solidFill>
+                <a:latin typeface="Microsoft YaHei"/>
+                <a:ea typeface="Microsoft YaHei"/>
+              </a:rPr>
+              <a:t>• 能力：用 Argo 管理 RayCluster 部署/扩缩/删除全生命周期</a:t>
             </a:r>
           </a:p>
         </p:txBody>
@@ -3646,8 +3680,8 @@
         </p:nvSpPr>
         <p:spPr>
           <a:xfrm>
-            <a:off x="8129016" y="1874519"/>
-            <a:ext cx="3703320" cy="2606040"/>
+            <a:off x="8101582" y="2084831"/>
+            <a:ext cx="3749039" cy="2267712"/>
           </a:xfrm>
           <a:prstGeom prst="rect">
             <a:avLst/>
@@ -3691,8 +3725,8 @@
         </p:nvSpPr>
         <p:spPr>
           <a:xfrm>
-            <a:off x="8266176" y="2011679"/>
-            <a:ext cx="3429000" cy="320040"/>
+            <a:off x="8229598" y="2176271"/>
+            <a:ext cx="3493007" cy="292608"/>
           </a:xfrm>
           <a:prstGeom prst="rect">
             <a:avLst/>
@@ -3707,14 +3741,14 @@
           <a:p>
             <a:pPr algn="l"/>
             <a:r>
-              <a:rPr sz="1500" b="1">
+              <a:rPr sz="1400" b="1">
                 <a:solidFill>
                   <a:srgbClr val="8B1A2B"/>
                 </a:solidFill>
                 <a:latin typeface="Microsoft YaHei"/>
                 <a:ea typeface="Microsoft YaHei"/>
               </a:rPr>
-              <a:t>03  Ray on ACK：容器优化…</a:t>
+              <a:t>03  容器优化的分布式计算</a:t>
             </a:r>
           </a:p>
         </p:txBody>
@@ -3727,8 +3761,8 @@
         </p:nvSpPr>
         <p:spPr>
           <a:xfrm>
-            <a:off x="8293608" y="2377439"/>
-            <a:ext cx="3374136" cy="1965960"/>
+            <a:off x="8229598" y="2487167"/>
+            <a:ext cx="3493007" cy="1764792"/>
           </a:xfrm>
           <a:prstGeom prst="rect">
             <a:avLst/>
@@ -3743,45 +3777,62 @@
           <a:p>
             <a:pPr algn="l">
               <a:spcAft>
-                <a:spcPts val="400"/>
+                <a:spcPts val="200"/>
               </a:spcAft>
             </a:pPr>
             <a:r>
-              <a:rPr sz="1200" b="1">
+              <a:rPr sz="1100" b="1">
                 <a:solidFill>
                   <a:srgbClr val="1A1A1A"/>
                 </a:solidFill>
                 <a:latin typeface="Microsoft YaHei"/>
                 <a:ea typeface="Microsoft YaHei"/>
               </a:rPr>
-              <a:t>面向大模型、具身智能、自动驾驶等大规模多模态数据处理与分布式 AI 计算；服务算法…</a:t>
+              <a:t>将「30s 万 Pod、单集群数万 RayCluster」作为 HCS 调度与控制面压测目标</a:t>
             </a:r>
           </a:p>
           <a:p>
             <a:pPr algn="l">
               <a:spcAft>
-                <a:spcPts val="400"/>
+                <a:spcPts val="200"/>
               </a:spcAft>
             </a:pPr>
             <a:r>
-              <a:rPr sz="1200" b="0">
+              <a:rPr sz="1100" b="0">
                 <a:solidFill>
                   <a:srgbClr val="4A4A4A"/>
                 </a:solidFill>
                 <a:latin typeface="Microsoft YaHei"/>
                 <a:ea typeface="Microsoft YaHei"/>
               </a:rPr>
-              <a:t>• Ray on ACK：Head/Worker Pod 自动扩缩；全生命周期、自动扩缩容、角色授权；底座 ACK Pro 托管企业级 K…</a:t>
+              <a:t>• 面向大模型、具身智能、自动驾驶等大规模多模态数据处理与分布式 AI 计算；服务算法与 DevOps 双角色。</a:t>
             </a:r>
           </a:p>
           <a:p>
             <a:pPr algn="l">
               <a:spcAft>
-                <a:spcPts val="400"/>
+                <a:spcPts val="200"/>
               </a:spcAft>
             </a:pPr>
             <a:r>
-              <a:rPr sz="1200" b="0">
+              <a:rPr sz="1100" b="0">
+                <a:solidFill>
+                  <a:srgbClr val="4A4A4A"/>
+                </a:solidFill>
+                <a:latin typeface="Microsoft YaHei"/>
+                <a:ea typeface="Microsoft YaHei"/>
+              </a:rPr>
+              <a:t>• Ray on ACK：Head/Worker Pod 自动扩缩</a:t>
+            </a:r>
+          </a:p>
+          <a:p>
+            <a:pPr algn="l">
+              <a:spcAft>
+                <a:spcPts val="200"/>
+              </a:spcAft>
+            </a:pPr>
+            <a:r>
+              <a:rPr sz="1100" b="0">
                 <a:solidFill>
                   <a:srgbClr val="4A4A4A"/>
                 </a:solidFill>
@@ -3801,8 +3852,8 @@
         </p:nvSpPr>
         <p:spPr>
           <a:xfrm>
-            <a:off x="320040" y="4617720"/>
-            <a:ext cx="7315200" cy="256032"/>
+            <a:off x="274320" y="4553712"/>
+            <a:ext cx="7315200" cy="237744"/>
           </a:xfrm>
           <a:prstGeom prst="rect">
             <a:avLst/>
@@ -3817,7 +3868,7 @@
           <a:p>
             <a:pPr algn="l"/>
             <a:r>
-              <a:rPr sz="1400" b="1">
+              <a:rPr sz="1300" b="1">
                 <a:solidFill>
                   <a:srgbClr val="1A1A1A"/>
                 </a:solidFill>
@@ -3837,8 +3888,8 @@
         </p:nvSpPr>
         <p:spPr>
           <a:xfrm>
-            <a:off x="320040" y="4910328"/>
-            <a:ext cx="1847088" cy="868680"/>
+            <a:off x="274320" y="4809744"/>
+            <a:ext cx="1874519" cy="960120"/>
           </a:xfrm>
           <a:prstGeom prst="rect">
             <a:avLst/>
@@ -3882,8 +3933,8 @@
         </p:nvSpPr>
         <p:spPr>
           <a:xfrm>
-            <a:off x="429768" y="4965192"/>
-            <a:ext cx="1664208" cy="201168"/>
+            <a:off x="365760" y="4864608"/>
+            <a:ext cx="1709927" cy="201168"/>
           </a:xfrm>
           <a:prstGeom prst="rect">
             <a:avLst/>
@@ -3905,7 +3956,7 @@
                 <a:latin typeface="Microsoft YaHei"/>
                 <a:ea typeface="Microsoft YaHei"/>
               </a:rPr>
-              <a:t>全托管容器 Argo …</a:t>
+              <a:t>相对开源自建</a:t>
             </a:r>
           </a:p>
         </p:txBody>
@@ -3918,8 +3969,8 @@
         </p:nvSpPr>
         <p:spPr>
           <a:xfrm>
-            <a:off x="429768" y="5166360"/>
-            <a:ext cx="1664208" cy="237744"/>
+            <a:off x="365760" y="5065776"/>
+            <a:ext cx="1709927" cy="256032"/>
           </a:xfrm>
           <a:prstGeom prst="rect">
             <a:avLst/>
@@ -3941,7 +3992,7 @@
                 <a:latin typeface="Microsoft YaHei"/>
                 <a:ea typeface="Microsoft YaHei"/>
               </a:rPr>
-              <a:t>规模：10,000+ 并发工作…</a:t>
+              <a:t>演讲口径</a:t>
             </a:r>
           </a:p>
         </p:txBody>
@@ -3954,8 +4005,8 @@
         </p:nvSpPr>
         <p:spPr>
           <a:xfrm>
-            <a:off x="429768" y="5413248"/>
-            <a:ext cx="1664208" cy="292608"/>
+            <a:off x="365760" y="5340096"/>
+            <a:ext cx="1709927" cy="365760"/>
           </a:xfrm>
           <a:prstGeom prst="rect">
             <a:avLst/>
@@ -3970,14 +4021,14 @@
           <a:p>
             <a:pPr algn="l"/>
             <a:r>
-              <a:rPr sz="1400" b="1">
+              <a:rPr sz="1200" b="1">
                 <a:solidFill>
                   <a:srgbClr val="8B1A2B"/>
                 </a:solidFill>
                 <a:latin typeface="Microsoft YaHei"/>
                 <a:ea typeface="Microsoft YaHei"/>
               </a:rPr>
-              <a:t>相对开源自建：资源成本约 -30%…</a:t>
+              <a:t>资源成本约 -30%，规模约 10×</a:t>
             </a:r>
           </a:p>
         </p:txBody>
@@ -3990,8 +4041,8 @@
         </p:nvSpPr>
         <p:spPr>
           <a:xfrm>
-            <a:off x="2276856" y="4910328"/>
-            <a:ext cx="1847088" cy="868680"/>
+            <a:off x="2240279" y="4809744"/>
+            <a:ext cx="1874519" cy="960120"/>
           </a:xfrm>
           <a:prstGeom prst="rect">
             <a:avLst/>
@@ -4035,8 +4086,8 @@
         </p:nvSpPr>
         <p:spPr>
           <a:xfrm>
-            <a:off x="2386584" y="4965192"/>
-            <a:ext cx="1664208" cy="201168"/>
+            <a:off x="2331719" y="4864608"/>
+            <a:ext cx="1709927" cy="201168"/>
           </a:xfrm>
           <a:prstGeom prst="rect">
             <a:avLst/>
@@ -4058,7 +4109,7 @@
                 <a:latin typeface="Microsoft YaHei"/>
                 <a:ea typeface="Microsoft YaHei"/>
               </a:rPr>
-              <a:t>Argo Workfl…</a:t>
+              <a:t>规模</a:t>
             </a:r>
           </a:p>
         </p:txBody>
@@ -4071,8 +4122,8 @@
         </p:nvSpPr>
         <p:spPr>
           <a:xfrm>
-            <a:off x="2386584" y="5166360"/>
-            <a:ext cx="1664208" cy="237744"/>
+            <a:off x="2331719" y="5065776"/>
+            <a:ext cx="1709927" cy="256032"/>
           </a:xfrm>
           <a:prstGeom prst="rect">
             <a:avLst/>
@@ -4094,7 +4145,7 @@
                 <a:latin typeface="Microsoft YaHei"/>
                 <a:ea typeface="Microsoft YaHei"/>
               </a:rPr>
-              <a:t>流水线：Spark / Ray…</a:t>
+              <a:t>演讲口径</a:t>
             </a:r>
           </a:p>
         </p:txBody>
@@ -4107,8 +4158,8 @@
         </p:nvSpPr>
         <p:spPr>
           <a:xfrm>
-            <a:off x="2386584" y="5413248"/>
-            <a:ext cx="1664208" cy="292608"/>
+            <a:off x="2331719" y="5340096"/>
+            <a:ext cx="1709927" cy="365760"/>
           </a:xfrm>
           <a:prstGeom prst="rect">
             <a:avLst/>
@@ -4123,14 +4174,14 @@
           <a:p>
             <a:pPr algn="l"/>
             <a:r>
-              <a:rPr sz="1400" b="1">
+              <a:rPr sz="1200" b="1">
                 <a:solidFill>
                   <a:srgbClr val="8B1A2B"/>
                 </a:solidFill>
                 <a:latin typeface="Microsoft YaHei"/>
                 <a:ea typeface="Microsoft YaHei"/>
               </a:rPr>
-              <a:t>编排对象：RayCluster 全…</a:t>
+              <a:t>10,000+ 并发工作流；</a:t>
             </a:r>
           </a:p>
         </p:txBody>
@@ -4143,8 +4194,8 @@
         </p:nvSpPr>
         <p:spPr>
           <a:xfrm>
-            <a:off x="4233672" y="4910328"/>
-            <a:ext cx="1847088" cy="868680"/>
+            <a:off x="4206238" y="4809744"/>
+            <a:ext cx="1874519" cy="960120"/>
           </a:xfrm>
           <a:prstGeom prst="rect">
             <a:avLst/>
@@ -4188,8 +4239,8 @@
         </p:nvSpPr>
         <p:spPr>
           <a:xfrm>
-            <a:off x="4343400" y="4965192"/>
-            <a:ext cx="1664208" cy="201168"/>
+            <a:off x="4297678" y="4864608"/>
+            <a:ext cx="1709927" cy="201168"/>
           </a:xfrm>
           <a:prstGeom prst="rect">
             <a:avLst/>
@@ -4211,7 +4262,7 @@
                 <a:latin typeface="Microsoft YaHei"/>
                 <a:ea typeface="Microsoft YaHei"/>
               </a:rPr>
-              <a:t>Ray on ACK：…</a:t>
+              <a:t>编排对象</a:t>
             </a:r>
           </a:p>
         </p:txBody>
@@ -4224,8 +4275,8 @@
         </p:nvSpPr>
         <p:spPr>
           <a:xfrm>
-            <a:off x="4343400" y="5166360"/>
-            <a:ext cx="1664208" cy="237744"/>
+            <a:off x="4297678" y="5065776"/>
+            <a:ext cx="1709927" cy="256032"/>
           </a:xfrm>
           <a:prstGeom prst="rect">
             <a:avLst/>
@@ -4247,7 +4298,7 @@
                 <a:latin typeface="Microsoft YaHei"/>
                 <a:ea typeface="Microsoft YaHei"/>
               </a:rPr>
-              <a:t>单 ACK 集群并发：约 30…</a:t>
+              <a:t>演讲口径</a:t>
             </a:r>
           </a:p>
         </p:txBody>
@@ -4260,8 +4311,8 @@
         </p:nvSpPr>
         <p:spPr>
           <a:xfrm>
-            <a:off x="4343400" y="5413248"/>
-            <a:ext cx="1664208" cy="292608"/>
+            <a:off x="4297678" y="5340096"/>
+            <a:ext cx="1709927" cy="365760"/>
           </a:xfrm>
           <a:prstGeom prst="rect">
             <a:avLst/>
@@ -4276,14 +4327,14 @@
           <a:p>
             <a:pPr algn="l"/>
             <a:r>
-              <a:rPr sz="1400" b="1">
+              <a:rPr sz="1200" b="1">
                 <a:solidFill>
                   <a:srgbClr val="8B1A2B"/>
                 </a:solidFill>
                 <a:latin typeface="Microsoft YaHei"/>
                 <a:ea typeface="Microsoft YaHei"/>
               </a:rPr>
-              <a:t>Ray Worker 弹性：30 …</a:t>
+              <a:t>RayCluster 全生命周期 + RayJob 可观测</a:t>
             </a:r>
           </a:p>
         </p:txBody>
@@ -4296,8 +4347,8 @@
         </p:nvSpPr>
         <p:spPr>
           <a:xfrm>
-            <a:off x="6190488" y="4910328"/>
-            <a:ext cx="1847088" cy="868680"/>
+            <a:off x="6172197" y="4809744"/>
+            <a:ext cx="1874519" cy="960120"/>
           </a:xfrm>
           <a:prstGeom prst="rect">
             <a:avLst/>
@@ -4341,8 +4392,8 @@
         </p:nvSpPr>
         <p:spPr>
           <a:xfrm>
-            <a:off x="6300216" y="4965192"/>
-            <a:ext cx="1664208" cy="201168"/>
+            <a:off x="6263637" y="4864608"/>
+            <a:ext cx="1709927" cy="201168"/>
           </a:xfrm>
           <a:prstGeom prst="rect">
             <a:avLst/>
@@ -4364,7 +4415,7 @@
                 <a:latin typeface="Microsoft YaHei"/>
                 <a:ea typeface="Microsoft YaHei"/>
               </a:rPr>
-              <a:t>数据闭环：天然的工作流…</a:t>
+              <a:t>流水线</a:t>
             </a:r>
           </a:p>
         </p:txBody>
@@ -4377,8 +4428,8 @@
         </p:nvSpPr>
         <p:spPr>
           <a:xfrm>
-            <a:off x="6300216" y="5166360"/>
-            <a:ext cx="1664208" cy="237744"/>
+            <a:off x="6263637" y="5065776"/>
+            <a:ext cx="1709927" cy="256032"/>
           </a:xfrm>
           <a:prstGeom prst="rect">
             <a:avLst/>
@@ -4400,7 +4451,7 @@
                 <a:latin typeface="Microsoft YaHei"/>
                 <a:ea typeface="Microsoft YaHei"/>
               </a:rPr>
-              <a:t>存储形态：本地存储 + 云端存…</a:t>
+              <a:t>演讲口径</a:t>
             </a:r>
           </a:p>
         </p:txBody>
@@ -4413,8 +4464,8 @@
         </p:nvSpPr>
         <p:spPr>
           <a:xfrm>
-            <a:off x="6300216" y="5413248"/>
-            <a:ext cx="1664208" cy="292608"/>
+            <a:off x="6263637" y="5340096"/>
+            <a:ext cx="1709927" cy="365760"/>
           </a:xfrm>
           <a:prstGeom prst="rect">
             <a:avLst/>
@@ -4429,14 +4480,14 @@
           <a:p>
             <a:pPr algn="l"/>
             <a:r>
-              <a:rPr sz="1400" b="1">
+              <a:rPr sz="1200" b="1">
                 <a:solidFill>
                   <a:srgbClr val="8B1A2B"/>
                 </a:solidFill>
                 <a:latin typeface="Microsoft YaHei"/>
                 <a:ea typeface="Microsoft YaHei"/>
               </a:rPr>
-              <a:t>存储形态：本地存储 + 云端存储统…</a:t>
+              <a:t>Spark / Ray / PyTorch 同引擎串联</a:t>
             </a:r>
           </a:p>
         </p:txBody>
@@ -4449,8 +4500,8 @@
         </p:nvSpPr>
         <p:spPr>
           <a:xfrm>
-            <a:off x="8147304" y="4910328"/>
-            <a:ext cx="1847088" cy="868680"/>
+            <a:off x="8138156" y="4809744"/>
+            <a:ext cx="1874519" cy="960120"/>
           </a:xfrm>
           <a:prstGeom prst="rect">
             <a:avLst/>
@@ -4494,8 +4545,8 @@
         </p:nvSpPr>
         <p:spPr>
           <a:xfrm>
-            <a:off x="8257032" y="4965192"/>
-            <a:ext cx="1664208" cy="201168"/>
+            <a:off x="8229596" y="4864608"/>
+            <a:ext cx="1709927" cy="201168"/>
           </a:xfrm>
           <a:prstGeom prst="rect">
             <a:avLst/>
@@ -4517,7 +4568,7 @@
                 <a:latin typeface="Microsoft YaHei"/>
                 <a:ea typeface="Microsoft YaHei"/>
               </a:rPr>
-              <a:t>为什么需要工作流引擎</a:t>
+              <a:t>容器优化的分布式计算</a:t>
             </a:r>
           </a:p>
         </p:txBody>
@@ -4530,8 +4581,8 @@
         </p:nvSpPr>
         <p:spPr>
           <a:xfrm>
-            <a:off x="8257032" y="5166360"/>
-            <a:ext cx="1664208" cy="237744"/>
+            <a:off x="8229596" y="5065776"/>
+            <a:ext cx="1709927" cy="256032"/>
           </a:xfrm>
           <a:prstGeom prst="rect">
             <a:avLst/>
@@ -4553,7 +4604,7 @@
                 <a:latin typeface="Microsoft YaHei"/>
                 <a:ea typeface="Microsoft YaHei"/>
               </a:rPr>
-              <a:t>复杂产线（如 Kubeflow…</a:t>
+              <a:t>演讲口径</a:t>
             </a:r>
           </a:p>
         </p:txBody>
@@ -4566,8 +4617,8 @@
         </p:nvSpPr>
         <p:spPr>
           <a:xfrm>
-            <a:off x="8257032" y="5413248"/>
-            <a:ext cx="1664208" cy="292608"/>
+            <a:off x="8229596" y="5340096"/>
+            <a:ext cx="1709927" cy="365760"/>
           </a:xfrm>
           <a:prstGeom prst="rect">
             <a:avLst/>
@@ -4582,14 +4633,14 @@
           <a:p>
             <a:pPr algn="l"/>
             <a:r>
-              <a:rPr sz="1400" b="1">
+              <a:rPr sz="1200" b="1">
                 <a:solidFill>
                   <a:srgbClr val="8B1A2B"/>
                 </a:solidFill>
                 <a:latin typeface="Microsoft YaHei"/>
                 <a:ea typeface="Microsoft YaHei"/>
               </a:rPr>
-              <a:t>引擎五能力：串联、传数、并发、调度…</a:t>
+              <a:t>Ray Worker 弹性：30 秒扩至 10</a:t>
             </a:r>
           </a:p>
         </p:txBody>
@@ -4602,8 +4653,8 @@
         </p:nvSpPr>
         <p:spPr>
           <a:xfrm>
-            <a:off x="10104120" y="4910328"/>
-            <a:ext cx="1847088" cy="868680"/>
+            <a:off x="10104115" y="4809744"/>
+            <a:ext cx="1874519" cy="960120"/>
           </a:xfrm>
           <a:prstGeom prst="rect">
             <a:avLst/>
@@ -4647,8 +4698,8 @@
         </p:nvSpPr>
         <p:spPr>
           <a:xfrm>
-            <a:off x="10213848" y="4965192"/>
-            <a:ext cx="1664208" cy="201168"/>
+            <a:off x="10195555" y="4864608"/>
+            <a:ext cx="1709927" cy="201168"/>
           </a:xfrm>
           <a:prstGeom prst="rect">
             <a:avLst/>
@@ -4670,7 +4721,7 @@
                 <a:latin typeface="Microsoft YaHei"/>
                 <a:ea typeface="Microsoft YaHei"/>
               </a:rPr>
-              <a:t>—</a:t>
+              <a:t>单 ACK 集群并发</a:t>
             </a:r>
           </a:p>
         </p:txBody>
@@ -4683,8 +4734,8 @@
         </p:nvSpPr>
         <p:spPr>
           <a:xfrm>
-            <a:off x="10213848" y="5166360"/>
-            <a:ext cx="1664208" cy="237744"/>
+            <a:off x="10195555" y="5065776"/>
+            <a:ext cx="1709927" cy="256032"/>
           </a:xfrm>
           <a:prstGeom prst="rect">
             <a:avLst/>
@@ -4706,7 +4757,7 @@
                 <a:latin typeface="Microsoft YaHei"/>
                 <a:ea typeface="Microsoft YaHei"/>
               </a:rPr>
-              <a:t>—</a:t>
+              <a:t>演讲口径</a:t>
             </a:r>
           </a:p>
         </p:txBody>
@@ -4719,8 +4770,8 @@
         </p:nvSpPr>
         <p:spPr>
           <a:xfrm>
-            <a:off x="10213848" y="5413248"/>
-            <a:ext cx="1664208" cy="292608"/>
+            <a:off x="10195555" y="5340096"/>
+            <a:ext cx="1709927" cy="365760"/>
           </a:xfrm>
           <a:prstGeom prst="rect">
             <a:avLst/>
@@ -4735,14 +4786,14 @@
           <a:p>
             <a:pPr algn="l"/>
             <a:r>
-              <a:rPr sz="1400" b="1">
+              <a:rPr sz="1200" b="1">
                 <a:solidFill>
                   <a:srgbClr val="8B1A2B"/>
                 </a:solidFill>
                 <a:latin typeface="Microsoft YaHei"/>
                 <a:ea typeface="Microsoft YaHei"/>
               </a:rPr>
-              <a:t>—</a:t>
+              <a:t>约 30,000 个 RayCluster</a:t>
             </a:r>
           </a:p>
         </p:txBody>
@@ -4755,8 +4806,8 @@
         </p:nvSpPr>
         <p:spPr>
           <a:xfrm>
-            <a:off x="0" y="5989320"/>
-            <a:ext cx="12191695" cy="868680"/>
+            <a:off x="0" y="5870448"/>
+            <a:ext cx="12191695" cy="987552"/>
           </a:xfrm>
           <a:prstGeom prst="rect">
             <a:avLst/>
@@ -4798,8 +4849,8 @@
         </p:nvSpPr>
         <p:spPr>
           <a:xfrm>
-            <a:off x="365760" y="6080760"/>
-            <a:ext cx="11430000" cy="256032"/>
+            <a:off x="320040" y="5943600"/>
+            <a:ext cx="11521440" cy="502920"/>
           </a:xfrm>
           <a:prstGeom prst="rect">
             <a:avLst/>
@@ -4814,14 +4865,14 @@
           <a:p>
             <a:pPr algn="l"/>
             <a:r>
-              <a:rPr sz="1200" b="1">
+              <a:rPr sz="1100" b="1">
                 <a:solidFill>
                   <a:srgbClr val="1A1A1A"/>
                 </a:solidFill>
                 <a:latin typeface="Microsoft YaHei"/>
                 <a:ea typeface="Microsoft YaHei"/>
               </a:rPr>
-              <a:t>可落地动作：以托管 Argo（Serverless/节点池混部）+ Ray on CCE/ACK 对标建设开放产线底座，用对象存储缓存与 GPU 公平配额吃下数据准备与分布式计算峰值。；产品叙事对齐「数据闭环=工作流」：采集—标注—训练—在环仿真—回…</a:t>
+              <a:t>可落地动作：以托管 Argo（Serverless/节点池混部）+ Ray on CCE/ACK 对标建设开放产线底座，用对象存储缓存与 GPU 公平配额吃下数据准备与分布式计算峰值；产品叙事对齐「数据闭环=工作流」：采集—标注—训练—在环仿真—回流要有一站式模板，并把合规治理做成默认横切能力；将「30s 万 Pod、单集群数万 RayCluster、万级并发工作流」写入 HCS 调度与控制面压测目标，作为与公有云 ACK 对标的硬指标。</a:t>
             </a:r>
           </a:p>
         </p:txBody>
@@ -4834,8 +4885,8 @@
         </p:nvSpPr>
         <p:spPr>
           <a:xfrm>
-            <a:off x="365760" y="6373368"/>
-            <a:ext cx="11430000" cy="256032"/>
+            <a:off x="320040" y="6437376"/>
+            <a:ext cx="11521440" cy="256032"/>
           </a:xfrm>
           <a:prstGeom prst="rect">
             <a:avLst/>
@@ -4850,7 +4901,7 @@
           <a:p>
             <a:pPr algn="l"/>
             <a:r>
-              <a:rPr sz="1000" b="0">
+              <a:rPr sz="900" b="0">
                 <a:solidFill>
                   <a:srgbClr val="6B6B6B"/>
                 </a:solidFill>
@@ -5092,7 +5143,7 @@
         <p:spPr>
           <a:xfrm>
             <a:off x="429768" y="1143000"/>
-            <a:ext cx="3496970" cy="292608"/>
+            <a:ext cx="3496970" cy="384048"/>
           </a:xfrm>
           <a:prstGeom prst="rect">
             <a:avLst/>
@@ -5114,7 +5165,7 @@
                 <a:latin typeface="Microsoft YaHei"/>
                 <a:ea typeface="Microsoft YaHei"/>
               </a:rPr>
-              <a:t>相对开源自建：资源成本约 -30%…</a:t>
+              <a:t>相对开源自建：资源成本约 -30%，规模约 10× · 规模：10</a:t>
             </a:r>
           </a:p>
         </p:txBody>
@@ -5135,7 +5186,7 @@
         </p:blipFill>
         <p:spPr>
           <a:xfrm>
-            <a:off x="429768" y="1928092"/>
+            <a:off x="429768" y="1946380"/>
             <a:ext cx="3496970" cy="2965239"/>
           </a:xfrm>
           <a:prstGeom prst="rect">
@@ -5233,7 +5284,7 @@
         <p:spPr>
           <a:xfrm>
             <a:off x="4347362" y="1143000"/>
-            <a:ext cx="3496970" cy="292608"/>
+            <a:ext cx="3496970" cy="384048"/>
           </a:xfrm>
           <a:prstGeom prst="rect">
             <a:avLst/>
@@ -5255,7 +5306,7 @@
                 <a:latin typeface="Microsoft YaHei"/>
                 <a:ea typeface="Microsoft YaHei"/>
               </a:rPr>
-              <a:t>编排对象：RayCluster 全…</a:t>
+              <a:t>编排对象：RayCluster 全生命周期 + RayJob 可观测 · 流水线：Spark / Ray / PyTorch 同引擎串联</a:t>
             </a:r>
           </a:p>
         </p:txBody>
@@ -5276,7 +5327,7 @@
         </p:blipFill>
         <p:spPr>
           <a:xfrm>
-            <a:off x="4347362" y="1928092"/>
+            <a:off x="4347362" y="1946380"/>
             <a:ext cx="3496970" cy="2965239"/>
           </a:xfrm>
           <a:prstGeom prst="rect">
@@ -5315,7 +5366,7 @@
                 <a:latin typeface="Microsoft YaHei"/>
                 <a:ea typeface="Microsoft YaHei"/>
               </a:rPr>
-              <a:t>Argo Workflows 生态集成：纳管 RayC…</a:t>
+              <a:t>Argo Workflows 生态集成：纳管 RayCluster</a:t>
             </a:r>
           </a:p>
         </p:txBody>
@@ -5374,7 +5425,7 @@
         <p:spPr>
           <a:xfrm>
             <a:off x="8264956" y="1143000"/>
-            <a:ext cx="3496970" cy="292608"/>
+            <a:ext cx="3496970" cy="384048"/>
           </a:xfrm>
           <a:prstGeom prst="rect">
             <a:avLst/>
@@ -5396,7 +5447,7 @@
                 <a:latin typeface="Microsoft YaHei"/>
                 <a:ea typeface="Microsoft YaHei"/>
               </a:rPr>
-              <a:t>Ray Worker 弹性：30 …</a:t>
+              <a:t>Ray Worker 弹性：30 秒扩至 10,000 容器 · 单 ACK 集群并发：约 30,000 个 RayCluster</a:t>
             </a:r>
           </a:p>
         </p:txBody>
@@ -5417,7 +5468,7 @@
         </p:blipFill>
         <p:spPr>
           <a:xfrm>
-            <a:off x="8264956" y="1928092"/>
+            <a:off x="8264956" y="1946380"/>
             <a:ext cx="3496970" cy="2965239"/>
           </a:xfrm>
           <a:prstGeom prst="rect">

--- a/yunqi-2026-agenda-201/docs/洞察一页-04-以 ACK 为底座的开放产线与数据飞轮.pptx
+++ b/yunqi-2026-agenda-201/docs/洞察一页-04-以 ACK 为底座的开放产线与数据飞轮.pptx
@@ -3323,7 +3323,7 @@
                 <a:latin typeface="Microsoft YaHei"/>
                 <a:ea typeface="Microsoft YaHei"/>
               </a:rPr>
-              <a:t>一句话判断：本场围绕 ACK 托管底座上的开放 AI 数据产线：以「数据闭环天然是工作流」为起点，用全托管容器 Argo 工作流集群编排大规模离线数据与科学计算（相对开源自建宣称约 30% 资源成本节省、规模约 10×）；Argo 原生纳管 RayCluster 生命周期，打通数据收集→Spark→Ray→PyTorch→归档；Ray on ACK 面向大模型/具身/智驾等分布式计算，给出万级 Pod 秒级扩容与单集群海量 RayCluster 并发指标。</a:t>
+              <a:t>一句话判断：ACK 托管底座上的开放 AI 数据产线：以「数据闭环天然是工作流」为起点，用全托管容器 Argo 工作流集群编排大规模离线数据与科学计算（相对开源自建宣称约 30% 资源成本节省、规模约 10×）；Argo 原生纳管 RayCluster 生命周期，打通数据收集→Spark→Ray→PyTorch→归档；Ray on ACK 面向大模型/具身/智驾等分布式计算，给出万级 Pod 秒级扩容与单集群海量 RayCluster 并发指标。</a:t>
             </a:r>
           </a:p>
         </p:txBody>
@@ -3444,7 +3444,7 @@
                 <a:latin typeface="Microsoft YaHei"/>
                 <a:ea typeface="Microsoft YaHei"/>
               </a:rPr>
-              <a:t>HCS 应在 CCE 上提供托管 Argo/Workflow 类 SKU（控制面托管 + Serverless/节点池执行）</a:t>
+              <a:t>在 CCE 上提供托管 Argo/Workflow 类 SKU（控制面托管 + Serverless/节点池执行）</a:t>
             </a:r>
           </a:p>
           <a:p>
@@ -3616,7 +3616,7 @@
                 <a:latin typeface="Microsoft YaHei"/>
                 <a:ea typeface="Microsoft YaHei"/>
               </a:rPr>
-              <a:t>开放产线关键是「工作流引擎纳管分布式计算框架」：HCS 应提供 Argo/Volcano 等与 Ray Operator 的托管组合</a:t>
+              <a:t>开放产线关键是「工作流引擎纳管分布式计算框架」： 应提供 Argo/Volcano 等与 Ray Operator 的托管组合</a:t>
             </a:r>
           </a:p>
           <a:p>
@@ -3788,7 +3788,7 @@
                 <a:latin typeface="Microsoft YaHei"/>
                 <a:ea typeface="Microsoft YaHei"/>
               </a:rPr>
-              <a:t>将「30s 万 Pod、单集群数万 RayCluster」作为 HCS 调度与控制面压测目标</a:t>
+              <a:t>宜把「30s 万 Pod、单集群数万 RayCluster」作为 调度与控制面压测目标</a:t>
             </a:r>
           </a:p>
           <a:p>
@@ -3992,7 +3992,7 @@
                 <a:latin typeface="Microsoft YaHei"/>
                 <a:ea typeface="Microsoft YaHei"/>
               </a:rPr>
-              <a:t>演讲口径</a:t>
+              <a:t>全托管容器 Argo 工作流集群</a:t>
             </a:r>
           </a:p>
         </p:txBody>
@@ -4145,7 +4145,7 @@
                 <a:latin typeface="Microsoft YaHei"/>
                 <a:ea typeface="Microsoft YaHei"/>
               </a:rPr>
-              <a:t>演讲口径</a:t>
+              <a:t>全托管容器 Argo 工作流集群</a:t>
             </a:r>
           </a:p>
         </p:txBody>
@@ -4262,7 +4262,7 @@
                 <a:latin typeface="Microsoft YaHei"/>
                 <a:ea typeface="Microsoft YaHei"/>
               </a:rPr>
-              <a:t>编排对象</a:t>
+              <a:t>天然的工作流模式</a:t>
             </a:r>
           </a:p>
         </p:txBody>
@@ -4298,7 +4298,7 @@
                 <a:latin typeface="Microsoft YaHei"/>
                 <a:ea typeface="Microsoft YaHei"/>
               </a:rPr>
-              <a:t>演讲口径</a:t>
+              <a:t>闭环环节：采集</a:t>
             </a:r>
           </a:p>
         </p:txBody>
@@ -4334,7 +4334,7 @@
                 <a:latin typeface="Microsoft YaHei"/>
                 <a:ea typeface="Microsoft YaHei"/>
               </a:rPr>
-              <a:t>RayCluster 全生命周期 + RayJob 可观测</a:t>
+              <a:t>标注→训练→多形态在环仿真→部署回流</a:t>
             </a:r>
           </a:p>
         </p:txBody>
@@ -4415,7 +4415,7 @@
                 <a:latin typeface="Microsoft YaHei"/>
                 <a:ea typeface="Microsoft YaHei"/>
               </a:rPr>
-              <a:t>流水线</a:t>
+              <a:t>引擎五能力</a:t>
             </a:r>
           </a:p>
         </p:txBody>
@@ -4451,7 +4451,7 @@
                 <a:latin typeface="Microsoft YaHei"/>
                 <a:ea typeface="Microsoft YaHei"/>
               </a:rPr>
-              <a:t>演讲口径</a:t>
+              <a:t>为什么需要工作流引擎</a:t>
             </a:r>
           </a:p>
         </p:txBody>
@@ -4487,7 +4487,7 @@
                 <a:latin typeface="Microsoft YaHei"/>
                 <a:ea typeface="Microsoft YaHei"/>
               </a:rPr>
-              <a:t>Spark / Ray / PyTorch 同引擎串联</a:t>
+              <a:t>串联、传数、并发、调度、失败重试</a:t>
             </a:r>
           </a:p>
         </p:txBody>
@@ -4568,7 +4568,7 @@
                 <a:latin typeface="Microsoft YaHei"/>
                 <a:ea typeface="Microsoft YaHei"/>
               </a:rPr>
-              <a:t>容器优化的分布式计算</a:t>
+              <a:t>存储形态</a:t>
             </a:r>
           </a:p>
         </p:txBody>
@@ -4604,7 +4604,7 @@
                 <a:latin typeface="Microsoft YaHei"/>
                 <a:ea typeface="Microsoft YaHei"/>
               </a:rPr>
-              <a:t>演讲口径</a:t>
+              <a:t>天然的工作流模式</a:t>
             </a:r>
           </a:p>
         </p:txBody>
@@ -4640,7 +4640,7 @@
                 <a:latin typeface="Microsoft YaHei"/>
                 <a:ea typeface="Microsoft YaHei"/>
               </a:rPr>
-              <a:t>Ray Worker 弹性：30 秒扩至 10</a:t>
+              <a:t>本地存储 + 云端存储统一进入数据管理平台</a:t>
             </a:r>
           </a:p>
         </p:txBody>
@@ -4721,7 +4721,7 @@
                 <a:latin typeface="Microsoft YaHei"/>
                 <a:ea typeface="Microsoft YaHei"/>
               </a:rPr>
-              <a:t>单 ACK 集群并发</a:t>
+              <a:t>Ray Worker 弹性</a:t>
             </a:r>
           </a:p>
         </p:txBody>
@@ -4757,7 +4757,7 @@
                 <a:latin typeface="Microsoft YaHei"/>
                 <a:ea typeface="Microsoft YaHei"/>
               </a:rPr>
-              <a:t>演讲口径</a:t>
+              <a:t>容器优化的分布式计算</a:t>
             </a:r>
           </a:p>
         </p:txBody>
@@ -4793,7 +4793,7 @@
                 <a:latin typeface="Microsoft YaHei"/>
                 <a:ea typeface="Microsoft YaHei"/>
               </a:rPr>
-              <a:t>约 30,000 个 RayCluster</a:t>
+              <a:t>30 秒扩至 10,000 容器</a:t>
             </a:r>
           </a:p>
         </p:txBody>
@@ -4872,7 +4872,7 @@
                 <a:latin typeface="Microsoft YaHei"/>
                 <a:ea typeface="Microsoft YaHei"/>
               </a:rPr>
-              <a:t>可落地动作：以托管 Argo（Serverless/节点池混部）+ Ray on CCE/ACK 对标建设开放产线底座，用对象存储缓存与 GPU 公平配额吃下数据准备与分布式计算峰值；产品叙事对齐「数据闭环=工作流」：采集—标注—训练—在环仿真—回流要有一站式模板，并把合规治理做成默认横切能力；将「30s 万 Pod、单集群数万 RayCluster、万级并发工作流」写入 HCS 调度与控制面压测目标，作为与公有云 ACK 对标的硬指标。</a:t>
+              <a:t>启示要点：以托管 Argo（Serverless/节点池混部）+ Ray on CCE/ACK 对标建设开放产线底座，用对象存储缓存与 GPU 公平配额吃下数据准备与分布式计算峰值；产品叙事对齐「数据闭环=工作流」：采集—标注—训练—在环仿真—回流要有一站式模板，并把合规治理做成默认横切能力；宜把「30s 万 Pod、单集群数万 RayCluster、万级并发工作流」。</a:t>
             </a:r>
           </a:p>
         </p:txBody>
@@ -4908,7 +4908,7 @@
                 <a:latin typeface="Microsoft YaHei"/>
                 <a:ea typeface="Microsoft YaHei"/>
               </a:rPr>
-              <a:t>来源：https://yunqi.aliyun.com/2026/session?agendaId=201 · Talk 04 华相  ·  视角：HCS 技术规划</a:t>
+              <a:t>来源：https://yunqi.aliyun.com/2026/session?agendaId=201 · Talk 04 华相</a:t>
             </a:r>
           </a:p>
         </p:txBody>
